--- a/public/fun/pack/pptx/family/가족소개_29_나혼자·1인가구_억새밭.pptx
+++ b/public/fun/pack/pptx/family/가족소개_29_나혼자·1인가구_억새밭.pptx
@@ -3286,6 +3286,14 @@
 <file path=ppt/slides/slide1.xml><?xml version="1.0" encoding="utf-8"?>
 <p:sld xmlns:a="http://schemas.openxmlformats.org/drawingml/2006/main" xmlns:p="http://schemas.openxmlformats.org/presentationml/2006/main" xmlns:r="http://schemas.openxmlformats.org/officeDocument/2006/relationships">
   <p:cSld>
+    <p:bg>
+      <p:bgPr>
+        <a:solidFill>
+          <a:srgbClr val="FBF5EC"/>
+        </a:solidFill>
+        <a:effectLst/>
+      </p:bgPr>
+    </p:bg>
     <p:spTree>
       <p:nvGrpSpPr>
         <p:cNvPr id="1" name=""/>
@@ -3293,30 +3301,120 @@
         <p:nvPr/>
       </p:nvGrpSpPr>
       <p:grpSpPr/>
-      <p:pic>
-        <p:nvPicPr>
-          <p:cNvPr id="3" name="표지 그림" descr="family-29.jpg"/>
-          <p:cNvPicPr>
-            <a:picLocks noChangeAspect="1"/>
-          </p:cNvPicPr>
+      <p:sp>
+        <p:nvSpPr>
+          <p:cNvPr id="3" name="사진 자리"/>
+          <p:cNvSpPr/>
           <p:nvPr/>
-        </p:nvPicPr>
-        <p:blipFill>
-          <a:blip r:embed="rId2"/>
-          <a:stretch>
-            <a:fillRect/>
-          </a:stretch>
-        </p:blipFill>
-        <p:spPr>
-          <a:xfrm>
-            <a:off x="0" y="0"/>
-            <a:ext cx="12191695" cy="6858000"/>
+        </p:nvSpPr>
+        <p:spPr>
+          <a:xfrm>
+            <a:off x="1463003" y="960120"/>
+            <a:ext cx="3657508" cy="4526280"/>
+          </a:xfrm>
+          <a:prstGeom prst="roundRect">
+            <a:avLst>
+              <a:gd name="adj" fmla="val 4000"/>
+            </a:avLst>
+          </a:prstGeom>
+          <a:solidFill>
+            <a:srgbClr val="EBD2AD"/>
+          </a:solidFill>
+          <a:ln>
+            <a:noFill/>
+          </a:ln>
+        </p:spPr>
+        <p:txBody>
+          <a:bodyPr rtlCol="0" anchor="ctr" wrap="square" lIns="54864" rIns="54864" tIns="27432" bIns="27432">
+            <a:noAutofit/>
+          </a:bodyPr>
+          <a:lstStyle/>
+          <a:p>
+            <a:pPr algn="ctr">
+              <a:lnSpc>
+                <a:spcPct val="100000"/>
+              </a:lnSpc>
+            </a:pPr>
+            <a:r>
+              <a:rPr sz="1400" b="0" i="0">
+                <a:solidFill>
+                  <a:srgbClr val="493B27"/>
+                </a:solidFill>
+              </a:rPr>
+              <a:t>사진을 넣어 주세요</a:t>
+            </a:r>
+          </a:p>
+        </p:txBody>
+      </p:sp>
+      <p:sp>
+        <p:nvSpPr>
+          <p:cNvPr id="4" name="장식"/>
+          <p:cNvSpPr/>
+          <p:nvPr/>
+        </p:nvSpPr>
+        <p:spPr>
+          <a:xfrm>
+            <a:off x="975335" y="1234439"/>
+            <a:ext cx="3657508" cy="4526280"/>
+          </a:xfrm>
+          <a:prstGeom prst="roundRect">
+            <a:avLst>
+              <a:gd name="adj" fmla="val 4000"/>
+            </a:avLst>
+          </a:prstGeom>
+          <a:noFill/>
+          <a:ln w="9525">
+            <a:solidFill>
+              <a:srgbClr val="26231F"/>
+            </a:solidFill>
+          </a:ln>
+        </p:spPr>
+        <p:txBody>
+          <a:bodyPr rtlCol="0" anchor="ctr"/>
+          <a:lstStyle/>
+          <a:p>
+            <a:pPr algn="ctr"/>
+          </a:p>
+        </p:txBody>
+      </p:sp>
+      <p:sp>
+        <p:nvSpPr>
+          <p:cNvPr id="5" name="라벨"/>
+          <p:cNvSpPr txBox="1"/>
+          <p:nvPr/>
+        </p:nvSpPr>
+        <p:spPr>
+          <a:xfrm>
+            <a:off x="6827349" y="2148840"/>
+            <a:ext cx="4632844" cy="274320"/>
           </a:xfrm>
           <a:prstGeom prst="rect">
             <a:avLst/>
           </a:prstGeom>
-        </p:spPr>
-      </p:pic>
+          <a:noFill/>
+        </p:spPr>
+        <p:txBody>
+          <a:bodyPr wrap="square" lIns="54864" rIns="54864" tIns="27432" bIns="27432" anchor="t">
+            <a:noAutofit/>
+          </a:bodyPr>
+          <a:lstStyle/>
+          <a:p>
+            <a:pPr algn="l">
+              <a:lnSpc>
+                <a:spcPct val="115000"/>
+              </a:lnSpc>
+            </a:pPr>
+            <a:r>
+              <a:rPr sz="1000" b="1" i="0" spc="250">
+                <a:solidFill>
+                  <a:srgbClr val="26231F"/>
+                </a:solidFill>
+              </a:rPr>
+              <a:t>FAMILY ALBUM</a:t>
+            </a:r>
+          </a:p>
+        </p:txBody>
+      </p:sp>
       <p:sp>
         <p:nvSpPr>
           <p:cNvPr id="2" name="Title 1"/>
@@ -3329,8 +3427,8 @@
         </p:nvSpPr>
         <p:spPr>
           <a:xfrm>
-            <a:off x="853418" y="2057400"/>
-            <a:ext cx="6095847" cy="1554480"/>
+            <a:off x="6827349" y="2606040"/>
+            <a:ext cx="4632844" cy="1188720"/>
           </a:xfrm>
         </p:spPr>
         <p:txBody>
@@ -3345,9 +3443,9 @@
               </a:lnSpc>
             </a:pPr>
             <a:r>
-              <a:rPr sz="3600" b="1" i="0">
-                <a:solidFill>
-                  <a:srgbClr val="59472C"/>
+              <a:rPr sz="4000" b="1" i="0">
+                <a:solidFill>
+                  <a:srgbClr val="26231F"/>
                 </a:solidFill>
               </a:rPr>
               <a:t>우리 가족을 소개합니다</a:t>
@@ -3357,14 +3455,14 @@
       </p:sp>
       <p:sp>
         <p:nvSpPr>
-          <p:cNvPr id="4" name="한 줄 문구"/>
+          <p:cNvPr id="6" name="한 줄 문구"/>
           <p:cNvSpPr txBox="1"/>
           <p:nvPr/>
         </p:nvSpPr>
         <p:spPr>
           <a:xfrm>
-            <a:off x="853418" y="3749039"/>
-            <a:ext cx="6095847" cy="822960"/>
+            <a:off x="6827349" y="3886200"/>
+            <a:ext cx="4632844" cy="822960"/>
           </a:xfrm>
           <a:prstGeom prst="rect">
             <a:avLst/>
@@ -3383,9 +3481,9 @@
               </a:lnSpc>
             </a:pPr>
             <a:r>
-              <a:rPr sz="1700" b="0" i="1">
-                <a:solidFill>
-                  <a:srgbClr val="59472C"/>
+              <a:rPr sz="1700" b="0" i="0">
+                <a:solidFill>
+                  <a:srgbClr val="26231F"/>
                 </a:solidFill>
               </a:rPr>
               <a:t>억새밭에서 바람 맞으며 혼자</a:t>
@@ -3395,14 +3493,14 @@
       </p:sp>
       <p:sp>
         <p:nvSpPr>
-          <p:cNvPr id="5" name="안내 문구"/>
+          <p:cNvPr id="7" name="안내 문구"/>
           <p:cNvSpPr txBox="1"/>
           <p:nvPr/>
         </p:nvSpPr>
         <p:spPr>
           <a:xfrm>
-            <a:off x="853418" y="4617720"/>
-            <a:ext cx="6095847" cy="914400"/>
+            <a:off x="6827349" y="4754880"/>
+            <a:ext cx="4632844" cy="914400"/>
           </a:xfrm>
           <a:prstGeom prst="rect">
             <a:avLst/>
@@ -3423,10 +3521,10 @@
             <a:r>
               <a:rPr sz="1400" b="0" i="0">
                 <a:solidFill>
-                  <a:srgbClr val="666666"/>
+                  <a:srgbClr val="26231F"/>
                 </a:solidFill>
               </a:rPr>
-              <a:t>나 혼자 · 1인 가구 · 2027. 00. 00</a:t>
+              <a:t>나 혼자 · 1인 가구 · 날짜 입력</a:t>
             </a:r>
           </a:p>
         </p:txBody>
@@ -3445,7 +3543,7 @@
     <p:bg>
       <p:bgPr>
         <a:solidFill>
-          <a:srgbClr val="FFFFFF"/>
+          <a:srgbClr val="F6E9D5"/>
         </a:solidFill>
         <a:effectLst/>
       </p:bgPr>
@@ -3459,20 +3557,20 @@
       <p:grpSpPr/>
       <p:sp>
         <p:nvSpPr>
-          <p:cNvPr id="3" name="장식"/>
+          <p:cNvPr id="3" name="포인트"/>
           <p:cNvSpPr/>
           <p:nvPr/>
         </p:nvSpPr>
         <p:spPr>
           <a:xfrm>
-            <a:off x="-182880" y="6144768"/>
-            <a:ext cx="12557455" cy="731520"/>
-          </a:xfrm>
-          <a:prstGeom prst="wave">
+            <a:off x="5958687" y="246888"/>
+            <a:ext cx="274320" cy="274320"/>
+          </a:xfrm>
+          <a:prstGeom prst="donut">
             <a:avLst/>
           </a:prstGeom>
           <a:solidFill>
-            <a:srgbClr val="ECE3D4"/>
+            <a:srgbClr val="D8B279"/>
           </a:solidFill>
           <a:ln>
             <a:noFill/>
@@ -3494,14 +3592,14 @@
         </p:nvSpPr>
         <p:spPr>
           <a:xfrm>
-            <a:off x="-182880" y="6400800"/>
-            <a:ext cx="12557455" cy="502920"/>
-          </a:xfrm>
-          <a:prstGeom prst="wave">
+            <a:off x="5684367" y="1572768"/>
+            <a:ext cx="822960" cy="22860"/>
+          </a:xfrm>
+          <a:prstGeom prst="rect">
             <a:avLst/>
           </a:prstGeom>
           <a:solidFill>
-            <a:srgbClr val="9D7D4D"/>
+            <a:srgbClr val="D8B279"/>
           </a:solidFill>
           <a:ln>
             <a:noFill/>
@@ -3517,19 +3615,19 @@
       </p:sp>
       <p:sp>
         <p:nvSpPr>
-          <p:cNvPr id="2" name="Title 1"/>
-          <p:cNvSpPr>
-            <a:spLocks noGrp="1"/>
-          </p:cNvSpPr>
-          <p:nvPr>
-            <p:ph type="title"/>
-          </p:nvPr>
-        </p:nvSpPr>
-        <p:spPr>
-          <a:xfrm>
-            <a:off x="640080" y="457200"/>
-            <a:ext cx="9722815" cy="868680"/>
-          </a:xfrm>
+          <p:cNvPr id="5" name="상단 라벨"/>
+          <p:cNvSpPr txBox="1"/>
+          <p:nvPr/>
+        </p:nvSpPr>
+        <p:spPr>
+          <a:xfrm>
+            <a:off x="640080" y="182880"/>
+            <a:ext cx="3657600" cy="274320"/>
+          </a:xfrm>
+          <a:prstGeom prst="rect">
+            <a:avLst/>
+          </a:prstGeom>
+          <a:noFill/>
         </p:spPr>
         <p:txBody>
           <a:bodyPr wrap="square" lIns="54864" rIns="54864" tIns="27432" bIns="27432" anchor="ctr">
@@ -3538,6 +3636,44 @@
           <a:lstStyle/>
           <a:p>
             <a:pPr algn="l">
+              <a:lnSpc>
+                <a:spcPct val="115000"/>
+              </a:lnSpc>
+            </a:pPr>
+            <a:r>
+              <a:rPr sz="800" b="1" i="0" spc="250">
+                <a:solidFill>
+                  <a:srgbClr val="8E8780"/>
+                </a:solidFill>
+              </a:rPr>
+              <a:t>FAMILY ALBUM</a:t>
+            </a:r>
+          </a:p>
+        </p:txBody>
+      </p:sp>
+      <p:sp>
+        <p:nvSpPr>
+          <p:cNvPr id="2" name="Title 1"/>
+          <p:cNvSpPr>
+            <a:spLocks noGrp="1"/>
+          </p:cNvSpPr>
+          <p:nvPr>
+            <p:ph type="title"/>
+          </p:nvPr>
+        </p:nvSpPr>
+        <p:spPr>
+          <a:xfrm>
+            <a:off x="1371600" y="640080"/>
+            <a:ext cx="9448495" cy="868680"/>
+          </a:xfrm>
+        </p:spPr>
+        <p:txBody>
+          <a:bodyPr wrap="square" lIns="54864" rIns="54864" tIns="27432" bIns="27432" anchor="ctr">
+            <a:noAutofit/>
+          </a:bodyPr>
+          <a:lstStyle/>
+          <a:p>
+            <a:pPr algn="ctr">
               <a:lnSpc>
                 <a:spcPct val="105000"/>
               </a:lnSpc>
@@ -3545,7 +3681,7 @@
             <a:r>
               <a:rPr sz="3000" b="1" i="0">
                 <a:solidFill>
-                  <a:srgbClr val="59472C"/>
+                  <a:srgbClr val="26231F"/>
                 </a:solidFill>
               </a:rPr>
               <a:t>가족 구성원</a:t>
@@ -3555,25 +3691,23 @@
       </p:sp>
       <p:sp>
         <p:nvSpPr>
-          <p:cNvPr id="5" name="사진 자리"/>
+          <p:cNvPr id="6" name="사진 자리"/>
           <p:cNvSpPr/>
           <p:nvPr/>
         </p:nvSpPr>
         <p:spPr>
           <a:xfrm>
-            <a:off x="1285189" y="1554480"/>
-            <a:ext cx="2194560" cy="2194560"/>
+            <a:off x="1239469" y="1783080"/>
+            <a:ext cx="2286000" cy="2286000"/>
           </a:xfrm>
           <a:prstGeom prst="ellipse">
             <a:avLst/>
           </a:prstGeom>
           <a:solidFill>
-            <a:srgbClr val="ECE3D4"/>
+            <a:srgbClr val="F6E9D5"/>
           </a:solidFill>
           <a:ln w="19050">
-            <a:solidFill>
-              <a:srgbClr val="9D7D4D"/>
-            </a:solidFill>
+            <a:noFill/>
             <a:prstDash val="dash"/>
           </a:ln>
         </p:spPr>
@@ -3591,7 +3725,7 @@
             <a:r>
               <a:rPr sz="1200" b="0" i="0">
                 <a:solidFill>
-                  <a:srgbClr val="59472C"/>
+                  <a:srgbClr val="8E8780"/>
                 </a:solidFill>
               </a:rPr>
               <a:t>사진</a:t>
@@ -3601,13 +3735,13 @@
       </p:sp>
       <p:sp>
         <p:nvSpPr>
-          <p:cNvPr id="6" name="TextBox 5"/>
+          <p:cNvPr id="7" name="TextBox 6"/>
           <p:cNvSpPr txBox="1"/>
           <p:nvPr/>
         </p:nvSpPr>
         <p:spPr>
           <a:xfrm>
-            <a:off x="640080" y="3840479"/>
+            <a:off x="640080" y="4160520"/>
             <a:ext cx="3484778" cy="411480"/>
           </a:xfrm>
           <a:prstGeom prst="rect">
@@ -3629,7 +3763,7 @@
             <a:r>
               <a:rPr sz="1600" b="1" i="0">
                 <a:solidFill>
-                  <a:srgbClr val="59472C"/>
+                  <a:srgbClr val="493B27"/>
                 </a:solidFill>
               </a:rPr>
               <a:t>나</a:t>
@@ -3639,14 +3773,14 @@
       </p:sp>
       <p:sp>
         <p:nvSpPr>
-          <p:cNvPr id="7" name="TextBox 6"/>
+          <p:cNvPr id="8" name="TextBox 7"/>
           <p:cNvSpPr txBox="1"/>
           <p:nvPr/>
         </p:nvSpPr>
         <p:spPr>
           <a:xfrm>
-            <a:off x="731519" y="4297679"/>
-            <a:ext cx="3301898" cy="1645919"/>
+            <a:off x="731519" y="4617720"/>
+            <a:ext cx="3301898" cy="1737360"/>
           </a:xfrm>
           <a:prstGeom prst="rect">
             <a:avLst/>
@@ -3707,25 +3841,23 @@
       </p:sp>
       <p:sp>
         <p:nvSpPr>
-          <p:cNvPr id="8" name="사진 자리"/>
+          <p:cNvPr id="9" name="사진 자리"/>
           <p:cNvSpPr/>
           <p:nvPr/>
         </p:nvSpPr>
         <p:spPr>
           <a:xfrm>
-            <a:off x="4998567" y="1554480"/>
-            <a:ext cx="2194560" cy="2194560"/>
+            <a:off x="4952847" y="1783080"/>
+            <a:ext cx="2286000" cy="2286000"/>
           </a:xfrm>
           <a:prstGeom prst="ellipse">
             <a:avLst/>
           </a:prstGeom>
           <a:solidFill>
-            <a:srgbClr val="ECE3D4"/>
+            <a:srgbClr val="F6E9D5"/>
           </a:solidFill>
           <a:ln w="19050">
-            <a:solidFill>
-              <a:srgbClr val="9D7D4D"/>
-            </a:solidFill>
+            <a:noFill/>
             <a:prstDash val="dash"/>
           </a:ln>
         </p:spPr>
@@ -3743,7 +3875,7 @@
             <a:r>
               <a:rPr sz="1200" b="0" i="0">
                 <a:solidFill>
-                  <a:srgbClr val="59472C"/>
+                  <a:srgbClr val="8E8780"/>
                 </a:solidFill>
               </a:rPr>
               <a:t>사진</a:t>
@@ -3753,13 +3885,13 @@
       </p:sp>
       <p:sp>
         <p:nvSpPr>
-          <p:cNvPr id="9" name="TextBox 8"/>
+          <p:cNvPr id="10" name="TextBox 9"/>
           <p:cNvSpPr txBox="1"/>
           <p:nvPr/>
         </p:nvSpPr>
         <p:spPr>
           <a:xfrm>
-            <a:off x="4353458" y="3840479"/>
+            <a:off x="4353458" y="4160520"/>
             <a:ext cx="3484778" cy="411480"/>
           </a:xfrm>
           <a:prstGeom prst="rect">
@@ -3781,7 +3913,7 @@
             <a:r>
               <a:rPr sz="1600" b="1" i="0">
                 <a:solidFill>
-                  <a:srgbClr val="59472C"/>
+                  <a:srgbClr val="493B27"/>
                 </a:solidFill>
               </a:rPr>
               <a:t>내 공간</a:t>
@@ -3791,14 +3923,14 @@
       </p:sp>
       <p:sp>
         <p:nvSpPr>
-          <p:cNvPr id="10" name="TextBox 9"/>
+          <p:cNvPr id="11" name="TextBox 10"/>
           <p:cNvSpPr txBox="1"/>
           <p:nvPr/>
         </p:nvSpPr>
         <p:spPr>
           <a:xfrm>
-            <a:off x="4444898" y="4297679"/>
-            <a:ext cx="3301898" cy="1645919"/>
+            <a:off x="4444898" y="4617720"/>
+            <a:ext cx="3301898" cy="1737360"/>
           </a:xfrm>
           <a:prstGeom prst="rect">
             <a:avLst/>
@@ -3859,25 +3991,23 @@
       </p:sp>
       <p:sp>
         <p:nvSpPr>
-          <p:cNvPr id="11" name="사진 자리"/>
+          <p:cNvPr id="12" name="사진 자리"/>
           <p:cNvSpPr/>
           <p:nvPr/>
         </p:nvSpPr>
         <p:spPr>
           <a:xfrm>
-            <a:off x="8711946" y="1554480"/>
-            <a:ext cx="2194560" cy="2194560"/>
+            <a:off x="8666226" y="1783080"/>
+            <a:ext cx="2286000" cy="2286000"/>
           </a:xfrm>
           <a:prstGeom prst="ellipse">
             <a:avLst/>
           </a:prstGeom>
           <a:solidFill>
-            <a:srgbClr val="ECE3D4"/>
+            <a:srgbClr val="F6E9D5"/>
           </a:solidFill>
           <a:ln w="19050">
-            <a:solidFill>
-              <a:srgbClr val="9D7D4D"/>
-            </a:solidFill>
+            <a:noFill/>
             <a:prstDash val="dash"/>
           </a:ln>
         </p:spPr>
@@ -3895,7 +4025,7 @@
             <a:r>
               <a:rPr sz="1200" b="0" i="0">
                 <a:solidFill>
-                  <a:srgbClr val="59472C"/>
+                  <a:srgbClr val="8E8780"/>
                 </a:solidFill>
               </a:rPr>
               <a:t>사진</a:t>
@@ -3905,13 +4035,13 @@
       </p:sp>
       <p:sp>
         <p:nvSpPr>
-          <p:cNvPr id="12" name="TextBox 11"/>
+          <p:cNvPr id="13" name="TextBox 12"/>
           <p:cNvSpPr txBox="1"/>
           <p:nvPr/>
         </p:nvSpPr>
         <p:spPr>
           <a:xfrm>
-            <a:off x="8066836" y="3840479"/>
+            <a:off x="8066836" y="4160520"/>
             <a:ext cx="3484778" cy="411480"/>
           </a:xfrm>
           <a:prstGeom prst="rect">
@@ -3933,7 +4063,7 @@
             <a:r>
               <a:rPr sz="1600" b="1" i="0">
                 <a:solidFill>
-                  <a:srgbClr val="59472C"/>
+                  <a:srgbClr val="493B27"/>
                 </a:solidFill>
               </a:rPr>
               <a:t>내 하루</a:t>
@@ -3943,14 +4073,14 @@
       </p:sp>
       <p:sp>
         <p:nvSpPr>
-          <p:cNvPr id="13" name="TextBox 12"/>
+          <p:cNvPr id="14" name="TextBox 13"/>
           <p:cNvSpPr txBox="1"/>
           <p:nvPr/>
         </p:nvSpPr>
         <p:spPr>
           <a:xfrm>
-            <a:off x="8158276" y="4297679"/>
-            <a:ext cx="3301898" cy="1645919"/>
+            <a:off x="8158276" y="4617720"/>
+            <a:ext cx="3301898" cy="1737360"/>
           </a:xfrm>
           <a:prstGeom prst="rect">
             <a:avLst/>
@@ -4023,7 +4153,7 @@
     <p:bg>
       <p:bgPr>
         <a:solidFill>
-          <a:srgbClr val="FFFFFF"/>
+          <a:srgbClr val="F6E9D5"/>
         </a:solidFill>
         <a:effectLst/>
       </p:bgPr>
@@ -4037,20 +4167,20 @@
       <p:grpSpPr/>
       <p:sp>
         <p:nvSpPr>
-          <p:cNvPr id="3" name="장식"/>
+          <p:cNvPr id="3" name="포인트"/>
           <p:cNvSpPr/>
           <p:nvPr/>
         </p:nvSpPr>
         <p:spPr>
           <a:xfrm>
-            <a:off x="-182880" y="6144768"/>
-            <a:ext cx="12557455" cy="731520"/>
-          </a:xfrm>
-          <a:prstGeom prst="wave">
+            <a:off x="5958687" y="246888"/>
+            <a:ext cx="274320" cy="274320"/>
+          </a:xfrm>
+          <a:prstGeom prst="donut">
             <a:avLst/>
           </a:prstGeom>
           <a:solidFill>
-            <a:srgbClr val="ECE3D4"/>
+            <a:srgbClr val="D8B279"/>
           </a:solidFill>
           <a:ln>
             <a:noFill/>
@@ -4072,14 +4202,14 @@
         </p:nvSpPr>
         <p:spPr>
           <a:xfrm>
-            <a:off x="-182880" y="6400800"/>
-            <a:ext cx="12557455" cy="502920"/>
-          </a:xfrm>
-          <a:prstGeom prst="wave">
+            <a:off x="5684367" y="1572768"/>
+            <a:ext cx="822960" cy="22860"/>
+          </a:xfrm>
+          <a:prstGeom prst="rect">
             <a:avLst/>
           </a:prstGeom>
           <a:solidFill>
-            <a:srgbClr val="9D7D4D"/>
+            <a:srgbClr val="D8B279"/>
           </a:solidFill>
           <a:ln>
             <a:noFill/>
@@ -4095,19 +4225,19 @@
       </p:sp>
       <p:sp>
         <p:nvSpPr>
-          <p:cNvPr id="2" name="Title 1"/>
-          <p:cNvSpPr>
-            <a:spLocks noGrp="1"/>
-          </p:cNvSpPr>
-          <p:nvPr>
-            <p:ph type="title"/>
-          </p:nvPr>
-        </p:nvSpPr>
-        <p:spPr>
-          <a:xfrm>
-            <a:off x="640080" y="457200"/>
-            <a:ext cx="9722815" cy="868680"/>
-          </a:xfrm>
+          <p:cNvPr id="5" name="상단 라벨"/>
+          <p:cNvSpPr txBox="1"/>
+          <p:nvPr/>
+        </p:nvSpPr>
+        <p:spPr>
+          <a:xfrm>
+            <a:off x="640080" y="182880"/>
+            <a:ext cx="3657600" cy="274320"/>
+          </a:xfrm>
+          <a:prstGeom prst="rect">
+            <a:avLst/>
+          </a:prstGeom>
+          <a:noFill/>
         </p:spPr>
         <p:txBody>
           <a:bodyPr wrap="square" lIns="54864" rIns="54864" tIns="27432" bIns="27432" anchor="ctr">
@@ -4116,6 +4246,44 @@
           <a:lstStyle/>
           <a:p>
             <a:pPr algn="l">
+              <a:lnSpc>
+                <a:spcPct val="115000"/>
+              </a:lnSpc>
+            </a:pPr>
+            <a:r>
+              <a:rPr sz="800" b="1" i="0" spc="250">
+                <a:solidFill>
+                  <a:srgbClr val="8E8780"/>
+                </a:solidFill>
+              </a:rPr>
+              <a:t>FAMILY ALBUM</a:t>
+            </a:r>
+          </a:p>
+        </p:txBody>
+      </p:sp>
+      <p:sp>
+        <p:nvSpPr>
+          <p:cNvPr id="2" name="Title 1"/>
+          <p:cNvSpPr>
+            <a:spLocks noGrp="1"/>
+          </p:cNvSpPr>
+          <p:nvPr>
+            <p:ph type="title"/>
+          </p:nvPr>
+        </p:nvSpPr>
+        <p:spPr>
+          <a:xfrm>
+            <a:off x="1371600" y="640080"/>
+            <a:ext cx="9448495" cy="868680"/>
+          </a:xfrm>
+        </p:spPr>
+        <p:txBody>
+          <a:bodyPr wrap="square" lIns="54864" rIns="54864" tIns="27432" bIns="27432" anchor="ctr">
+            <a:noAutofit/>
+          </a:bodyPr>
+          <a:lstStyle/>
+          <a:p>
+            <a:pPr algn="ctr">
               <a:lnSpc>
                 <a:spcPct val="105000"/>
               </a:lnSpc>
@@ -4123,7 +4291,7 @@
             <a:r>
               <a:rPr sz="3000" b="1" i="0">
                 <a:solidFill>
-                  <a:srgbClr val="59472C"/>
+                  <a:srgbClr val="26231F"/>
                 </a:solidFill>
               </a:rPr>
               <a:t>우리 가족 이야기</a:t>
@@ -4133,20 +4301,20 @@
       </p:sp>
       <p:sp>
         <p:nvSpPr>
-          <p:cNvPr id="5" name="타임라인 선"/>
+          <p:cNvPr id="6" name="타임라인 선"/>
           <p:cNvSpPr/>
           <p:nvPr/>
         </p:nvSpPr>
         <p:spPr>
           <a:xfrm>
-            <a:off x="640080" y="3291840"/>
+            <a:off x="640080" y="3520440"/>
             <a:ext cx="10911535" cy="54864"/>
           </a:xfrm>
           <a:prstGeom prst="rect">
             <a:avLst/>
           </a:prstGeom>
           <a:solidFill>
-            <a:srgbClr val="ECE3D4"/>
+            <a:srgbClr val="F6E9D5"/>
           </a:solidFill>
           <a:ln>
             <a:noFill/>
@@ -4162,20 +4330,20 @@
       </p:sp>
       <p:sp>
         <p:nvSpPr>
-          <p:cNvPr id="6" name="때 1"/>
+          <p:cNvPr id="7" name="때 1"/>
           <p:cNvSpPr/>
           <p:nvPr/>
         </p:nvSpPr>
         <p:spPr>
           <a:xfrm>
-            <a:off x="1802853" y="3108960"/>
+            <a:off x="1802853" y="3337560"/>
             <a:ext cx="402336" cy="402336"/>
           </a:xfrm>
           <a:prstGeom prst="ellipse">
             <a:avLst/>
           </a:prstGeom>
           <a:solidFill>
-            <a:srgbClr val="9D7D4D"/>
+            <a:srgbClr val="D8B279"/>
           </a:solidFill>
           <a:ln w="38100">
             <a:solidFill>
@@ -4193,13 +4361,13 @@
       </p:sp>
       <p:sp>
         <p:nvSpPr>
-          <p:cNvPr id="7" name="TextBox 6"/>
+          <p:cNvPr id="8" name="TextBox 7"/>
           <p:cNvSpPr txBox="1"/>
           <p:nvPr/>
         </p:nvSpPr>
         <p:spPr>
           <a:xfrm>
-            <a:off x="685800" y="2468880"/>
+            <a:off x="685800" y="2697480"/>
             <a:ext cx="2636443" cy="457200"/>
           </a:xfrm>
           <a:prstGeom prst="rect">
@@ -4221,7 +4389,7 @@
             <a:r>
               <a:rPr sz="1600" b="1" i="0">
                 <a:solidFill>
-                  <a:srgbClr val="9D7D4D"/>
+                  <a:srgbClr val="D8B279"/>
                 </a:solidFill>
               </a:rPr>
               <a:t>태어난 곳</a:t>
@@ -4231,13 +4399,13 @@
       </p:sp>
       <p:sp>
         <p:nvSpPr>
-          <p:cNvPr id="8" name="TextBox 7"/>
+          <p:cNvPr id="9" name="TextBox 8"/>
           <p:cNvSpPr txBox="1"/>
           <p:nvPr/>
         </p:nvSpPr>
         <p:spPr>
           <a:xfrm>
-            <a:off x="731519" y="3657600"/>
+            <a:off x="731519" y="3886200"/>
             <a:ext cx="2545003" cy="457200"/>
           </a:xfrm>
           <a:prstGeom prst="rect">
@@ -4259,7 +4427,7 @@
             <a:r>
               <a:rPr sz="1800" b="1" i="0">
                 <a:solidFill>
-                  <a:srgbClr val="59472C"/>
+                  <a:srgbClr val="493B27"/>
                 </a:solidFill>
               </a:rPr>
               <a:t>나의 뿌리</a:t>
@@ -4269,13 +4437,13 @@
       </p:sp>
       <p:sp>
         <p:nvSpPr>
-          <p:cNvPr id="9" name="TextBox 8"/>
+          <p:cNvPr id="10" name="TextBox 9"/>
           <p:cNvSpPr txBox="1"/>
           <p:nvPr/>
         </p:nvSpPr>
         <p:spPr>
           <a:xfrm>
-            <a:off x="731519" y="4160520"/>
+            <a:off x="731519" y="4389120"/>
             <a:ext cx="2545003" cy="1645920"/>
           </a:xfrm>
           <a:prstGeom prst="rect">
@@ -4297,7 +4465,7 @@
             <a:r>
               <a:rPr sz="1500" b="0" i="0">
                 <a:solidFill>
-                  <a:srgbClr val="2B2B2B"/>
+                  <a:srgbClr val="26231F"/>
                 </a:solidFill>
               </a:rPr>
               <a:t>고향의 기억을 적어요</a:t>
@@ -4307,20 +4475,20 @@
       </p:sp>
       <p:sp>
         <p:nvSpPr>
-          <p:cNvPr id="10" name="때 2"/>
+          <p:cNvPr id="11" name="때 2"/>
           <p:cNvSpPr/>
           <p:nvPr/>
         </p:nvSpPr>
         <p:spPr>
           <a:xfrm>
-            <a:off x="4530737" y="3108960"/>
+            <a:off x="4530737" y="3337560"/>
             <a:ext cx="402336" cy="402336"/>
           </a:xfrm>
           <a:prstGeom prst="ellipse">
             <a:avLst/>
           </a:prstGeom>
           <a:solidFill>
-            <a:srgbClr val="9D7D4D"/>
+            <a:srgbClr val="D8B279"/>
           </a:solidFill>
           <a:ln w="38100">
             <a:solidFill>
@@ -4338,13 +4506,13 @@
       </p:sp>
       <p:sp>
         <p:nvSpPr>
-          <p:cNvPr id="11" name="TextBox 10"/>
+          <p:cNvPr id="12" name="TextBox 11"/>
           <p:cNvSpPr txBox="1"/>
           <p:nvPr/>
         </p:nvSpPr>
         <p:spPr>
           <a:xfrm>
-            <a:off x="3413683" y="2468880"/>
+            <a:off x="3413683" y="2697480"/>
             <a:ext cx="2636443" cy="457200"/>
           </a:xfrm>
           <a:prstGeom prst="rect">
@@ -4366,7 +4534,7 @@
             <a:r>
               <a:rPr sz="1600" b="1" i="0">
                 <a:solidFill>
-                  <a:srgbClr val="9D7D4D"/>
+                  <a:srgbClr val="D8B279"/>
                 </a:solidFill>
               </a:rPr>
               <a:t>학창 시절</a:t>
@@ -4376,13 +4544,13 @@
       </p:sp>
       <p:sp>
         <p:nvSpPr>
-          <p:cNvPr id="12" name="TextBox 11"/>
+          <p:cNvPr id="13" name="TextBox 12"/>
           <p:cNvSpPr txBox="1"/>
           <p:nvPr/>
         </p:nvSpPr>
         <p:spPr>
           <a:xfrm>
-            <a:off x="3459403" y="3657600"/>
+            <a:off x="3459403" y="3886200"/>
             <a:ext cx="2545003" cy="457200"/>
           </a:xfrm>
           <a:prstGeom prst="rect">
@@ -4404,7 +4572,7 @@
             <a:r>
               <a:rPr sz="1800" b="1" i="0">
                 <a:solidFill>
-                  <a:srgbClr val="59472C"/>
+                  <a:srgbClr val="493B27"/>
                 </a:solidFill>
               </a:rPr>
               <a:t>자라던 시간</a:t>
@@ -4414,13 +4582,13 @@
       </p:sp>
       <p:sp>
         <p:nvSpPr>
-          <p:cNvPr id="13" name="TextBox 12"/>
+          <p:cNvPr id="14" name="TextBox 13"/>
           <p:cNvSpPr txBox="1"/>
           <p:nvPr/>
         </p:nvSpPr>
         <p:spPr>
           <a:xfrm>
-            <a:off x="3459403" y="4160520"/>
+            <a:off x="3459403" y="4389120"/>
             <a:ext cx="2545003" cy="1645920"/>
           </a:xfrm>
           <a:prstGeom prst="rect">
@@ -4442,7 +4610,7 @@
             <a:r>
               <a:rPr sz="1500" b="0" i="0">
                 <a:solidFill>
-                  <a:srgbClr val="2B2B2B"/>
+                  <a:srgbClr val="26231F"/>
                 </a:solidFill>
               </a:rPr>
               <a:t>가장 좋았던 기억</a:t>
@@ -4452,20 +4620,20 @@
       </p:sp>
       <p:sp>
         <p:nvSpPr>
-          <p:cNvPr id="14" name="때 3"/>
+          <p:cNvPr id="15" name="때 3"/>
           <p:cNvSpPr/>
           <p:nvPr/>
         </p:nvSpPr>
         <p:spPr>
           <a:xfrm>
-            <a:off x="7258621" y="3108960"/>
+            <a:off x="7258621" y="3337560"/>
             <a:ext cx="402336" cy="402336"/>
           </a:xfrm>
           <a:prstGeom prst="ellipse">
             <a:avLst/>
           </a:prstGeom>
           <a:solidFill>
-            <a:srgbClr val="9D7D4D"/>
+            <a:srgbClr val="D8B279"/>
           </a:solidFill>
           <a:ln w="38100">
             <a:solidFill>
@@ -4483,13 +4651,13 @@
       </p:sp>
       <p:sp>
         <p:nvSpPr>
-          <p:cNvPr id="15" name="TextBox 14"/>
+          <p:cNvPr id="16" name="TextBox 15"/>
           <p:cNvSpPr txBox="1"/>
           <p:nvPr/>
         </p:nvSpPr>
         <p:spPr>
           <a:xfrm>
-            <a:off x="6141567" y="2468880"/>
+            <a:off x="6141567" y="2697480"/>
             <a:ext cx="2636443" cy="457200"/>
           </a:xfrm>
           <a:prstGeom prst="rect">
@@ -4511,7 +4679,7 @@
             <a:r>
               <a:rPr sz="1600" b="1" i="0">
                 <a:solidFill>
-                  <a:srgbClr val="9D7D4D"/>
+                  <a:srgbClr val="D8B279"/>
                 </a:solidFill>
               </a:rPr>
               <a:t>혼자 시작한 날</a:t>
@@ -4521,13 +4689,13 @@
       </p:sp>
       <p:sp>
         <p:nvSpPr>
-          <p:cNvPr id="16" name="TextBox 15"/>
+          <p:cNvPr id="17" name="TextBox 16"/>
           <p:cNvSpPr txBox="1"/>
           <p:nvPr/>
         </p:nvSpPr>
         <p:spPr>
           <a:xfrm>
-            <a:off x="6187287" y="3657600"/>
+            <a:off x="6187287" y="3886200"/>
             <a:ext cx="2545003" cy="457200"/>
           </a:xfrm>
           <a:prstGeom prst="rect">
@@ -4549,7 +4717,7 @@
             <a:r>
               <a:rPr sz="1800" b="1" i="0">
                 <a:solidFill>
-                  <a:srgbClr val="59472C"/>
+                  <a:srgbClr val="493B27"/>
                 </a:solidFill>
               </a:rPr>
               <a:t>나의 첫 집</a:t>
@@ -4559,13 +4727,13 @@
       </p:sp>
       <p:sp>
         <p:nvSpPr>
-          <p:cNvPr id="17" name="TextBox 16"/>
+          <p:cNvPr id="18" name="TextBox 17"/>
           <p:cNvSpPr txBox="1"/>
           <p:nvPr/>
         </p:nvSpPr>
         <p:spPr>
           <a:xfrm>
-            <a:off x="6187287" y="4160520"/>
+            <a:off x="6187287" y="4389120"/>
             <a:ext cx="2545003" cy="1645920"/>
           </a:xfrm>
           <a:prstGeom prst="rect">
@@ -4587,7 +4755,7 @@
             <a:r>
               <a:rPr sz="1500" b="0" i="0">
                 <a:solidFill>
-                  <a:srgbClr val="2B2B2B"/>
+                  <a:srgbClr val="26231F"/>
                 </a:solidFill>
               </a:rPr>
               <a:t>독립하던 날</a:t>
@@ -4597,20 +4765,20 @@
       </p:sp>
       <p:sp>
         <p:nvSpPr>
-          <p:cNvPr id="18" name="때 4"/>
+          <p:cNvPr id="19" name="때 4"/>
           <p:cNvSpPr/>
           <p:nvPr/>
         </p:nvSpPr>
         <p:spPr>
           <a:xfrm>
-            <a:off x="9986505" y="3108960"/>
+            <a:off x="9986505" y="3337560"/>
             <a:ext cx="402336" cy="402336"/>
           </a:xfrm>
           <a:prstGeom prst="ellipse">
             <a:avLst/>
           </a:prstGeom>
           <a:solidFill>
-            <a:srgbClr val="9D7D4D"/>
+            <a:srgbClr val="D8B279"/>
           </a:solidFill>
           <a:ln w="38100">
             <a:solidFill>
@@ -4628,13 +4796,13 @@
       </p:sp>
       <p:sp>
         <p:nvSpPr>
-          <p:cNvPr id="19" name="TextBox 18"/>
+          <p:cNvPr id="20" name="TextBox 19"/>
           <p:cNvSpPr txBox="1"/>
           <p:nvPr/>
         </p:nvSpPr>
         <p:spPr>
           <a:xfrm>
-            <a:off x="8869451" y="2468880"/>
+            <a:off x="8869451" y="2697480"/>
             <a:ext cx="2636443" cy="457200"/>
           </a:xfrm>
           <a:prstGeom prst="rect">
@@ -4656,7 +4824,7 @@
             <a:r>
               <a:rPr sz="1600" b="1" i="0">
                 <a:solidFill>
-                  <a:srgbClr val="9D7D4D"/>
+                  <a:srgbClr val="D8B279"/>
                 </a:solidFill>
               </a:rPr>
               <a:t>지금</a:t>
@@ -4666,13 +4834,13 @@
       </p:sp>
       <p:sp>
         <p:nvSpPr>
-          <p:cNvPr id="20" name="TextBox 19"/>
+          <p:cNvPr id="21" name="TextBox 20"/>
           <p:cNvSpPr txBox="1"/>
           <p:nvPr/>
         </p:nvSpPr>
         <p:spPr>
           <a:xfrm>
-            <a:off x="8915171" y="3657600"/>
+            <a:off x="8915171" y="3886200"/>
             <a:ext cx="2545003" cy="457200"/>
           </a:xfrm>
           <a:prstGeom prst="rect">
@@ -4694,7 +4862,7 @@
             <a:r>
               <a:rPr sz="1800" b="1" i="0">
                 <a:solidFill>
-                  <a:srgbClr val="59472C"/>
+                  <a:srgbClr val="493B27"/>
                 </a:solidFill>
               </a:rPr>
               <a:t>오늘의 나</a:t>
@@ -4704,13 +4872,13 @@
       </p:sp>
       <p:sp>
         <p:nvSpPr>
-          <p:cNvPr id="21" name="TextBox 20"/>
+          <p:cNvPr id="22" name="TextBox 21"/>
           <p:cNvSpPr txBox="1"/>
           <p:nvPr/>
         </p:nvSpPr>
         <p:spPr>
           <a:xfrm>
-            <a:off x="8915171" y="4160520"/>
+            <a:off x="8915171" y="4389120"/>
             <a:ext cx="2545003" cy="1645920"/>
           </a:xfrm>
           <a:prstGeom prst="rect">
@@ -4732,7 +4900,7 @@
             <a:r>
               <a:rPr sz="1500" b="0" i="0">
                 <a:solidFill>
-                  <a:srgbClr val="2B2B2B"/>
+                  <a:srgbClr val="26231F"/>
                 </a:solidFill>
               </a:rPr>
               <a:t>요즘 내 이야기</a:t>
@@ -4754,7 +4922,7 @@
     <p:bg>
       <p:bgPr>
         <a:solidFill>
-          <a:srgbClr val="FFFFFF"/>
+          <a:srgbClr val="F6E9D5"/>
         </a:solidFill>
         <a:effectLst/>
       </p:bgPr>
@@ -4768,20 +4936,20 @@
       <p:grpSpPr/>
       <p:sp>
         <p:nvSpPr>
-          <p:cNvPr id="3" name="장식"/>
+          <p:cNvPr id="3" name="포인트"/>
           <p:cNvSpPr/>
           <p:nvPr/>
         </p:nvSpPr>
         <p:spPr>
           <a:xfrm>
-            <a:off x="-182880" y="6144768"/>
-            <a:ext cx="12557455" cy="731520"/>
-          </a:xfrm>
-          <a:prstGeom prst="wave">
+            <a:off x="5958687" y="246888"/>
+            <a:ext cx="274320" cy="274320"/>
+          </a:xfrm>
+          <a:prstGeom prst="donut">
             <a:avLst/>
           </a:prstGeom>
           <a:solidFill>
-            <a:srgbClr val="ECE3D4"/>
+            <a:srgbClr val="D8B279"/>
           </a:solidFill>
           <a:ln>
             <a:noFill/>
@@ -4803,14 +4971,14 @@
         </p:nvSpPr>
         <p:spPr>
           <a:xfrm>
-            <a:off x="-182880" y="6400800"/>
-            <a:ext cx="12557455" cy="502920"/>
-          </a:xfrm>
-          <a:prstGeom prst="wave">
+            <a:off x="5684367" y="1572768"/>
+            <a:ext cx="822960" cy="22860"/>
+          </a:xfrm>
+          <a:prstGeom prst="rect">
             <a:avLst/>
           </a:prstGeom>
           <a:solidFill>
-            <a:srgbClr val="9D7D4D"/>
+            <a:srgbClr val="D8B279"/>
           </a:solidFill>
           <a:ln>
             <a:noFill/>
@@ -4826,128 +4994,14 @@
       </p:sp>
       <p:sp>
         <p:nvSpPr>
-          <p:cNvPr id="2" name="Title 1"/>
-          <p:cNvSpPr>
-            <a:spLocks noGrp="1"/>
-          </p:cNvSpPr>
-          <p:nvPr>
-            <p:ph type="title"/>
-          </p:nvPr>
-        </p:nvSpPr>
-        <p:spPr>
-          <a:xfrm>
-            <a:off x="640080" y="457200"/>
-            <a:ext cx="9722815" cy="868680"/>
-          </a:xfrm>
-        </p:spPr>
-        <p:txBody>
-          <a:bodyPr wrap="square" lIns="54864" rIns="54864" tIns="27432" bIns="27432" anchor="ctr">
-            <a:noAutofit/>
-          </a:bodyPr>
-          <a:lstStyle/>
-          <a:p>
-            <a:pPr algn="l">
-              <a:lnSpc>
-                <a:spcPct val="105000"/>
-              </a:lnSpc>
-            </a:pPr>
-            <a:r>
-              <a:rPr sz="3000" b="1" i="0">
-                <a:solidFill>
-                  <a:srgbClr val="59472C"/>
-                </a:solidFill>
-              </a:rPr>
-              <a:t>우리 가족의 약속</a:t>
-            </a:r>
-          </a:p>
-        </p:txBody>
-      </p:sp>
-      <p:sp>
-        <p:nvSpPr>
-          <p:cNvPr id="5" name="줄 1"/>
-          <p:cNvSpPr/>
-          <p:nvPr/>
-        </p:nvSpPr>
-        <p:spPr>
-          <a:xfrm>
-            <a:off x="640080" y="1554480"/>
-            <a:ext cx="10911535" cy="1005840"/>
-          </a:xfrm>
-          <a:prstGeom prst="roundRect">
-            <a:avLst>
-              <a:gd name="adj" fmla="val 8000"/>
-            </a:avLst>
-          </a:prstGeom>
-          <a:solidFill>
-            <a:srgbClr val="F8F5F1"/>
-          </a:solidFill>
-          <a:ln w="12700">
-            <a:solidFill>
-              <a:srgbClr val="ECE3D4"/>
-            </a:solidFill>
-          </a:ln>
-        </p:spPr>
-        <p:txBody>
-          <a:bodyPr rtlCol="0" anchor="ctr"/>
-          <a:lstStyle/>
-          <a:p>
-            <a:pPr algn="ctr"/>
-          </a:p>
-        </p:txBody>
-      </p:sp>
-      <p:sp>
-        <p:nvSpPr>
-          <p:cNvPr id="6" name="번호 1"/>
-          <p:cNvSpPr/>
-          <p:nvPr/>
-        </p:nvSpPr>
-        <p:spPr>
-          <a:xfrm>
-            <a:off x="822959" y="1828800"/>
-            <a:ext cx="457200" cy="457200"/>
-          </a:xfrm>
-          <a:prstGeom prst="ellipse">
-            <a:avLst/>
-          </a:prstGeom>
-          <a:solidFill>
-            <a:srgbClr val="9D7D4D"/>
-          </a:solidFill>
-          <a:ln>
-            <a:noFill/>
-          </a:ln>
-        </p:spPr>
-        <p:txBody>
-          <a:bodyPr rtlCol="0" anchor="ctr" wrap="square" lIns="54864" rIns="54864" tIns="27432" bIns="27432">
-            <a:noAutofit/>
-          </a:bodyPr>
-          <a:lstStyle/>
-          <a:p>
-            <a:pPr algn="ctr">
-              <a:lnSpc>
-                <a:spcPct val="100000"/>
-              </a:lnSpc>
-            </a:pPr>
-            <a:r>
-              <a:rPr sz="1600" b="1" i="0">
-                <a:solidFill>
-                  <a:srgbClr val="FFFFFF"/>
-                </a:solidFill>
-              </a:rPr>
-              <a:t>1</a:t>
-            </a:r>
-          </a:p>
-        </p:txBody>
-      </p:sp>
-      <p:sp>
-        <p:nvSpPr>
-          <p:cNvPr id="7" name="TextBox 6"/>
+          <p:cNvPr id="5" name="상단 라벨"/>
           <p:cNvSpPr txBox="1"/>
           <p:nvPr/>
         </p:nvSpPr>
         <p:spPr>
           <a:xfrm>
-            <a:off x="1508760" y="1600200"/>
-            <a:ext cx="2743200" cy="914400"/>
+            <a:off x="640080" y="182880"/>
+            <a:ext cx="3657600" cy="274320"/>
           </a:xfrm>
           <a:prstGeom prst="rect">
             <a:avLst/>
@@ -4966,26 +5020,95 @@
               </a:lnSpc>
             </a:pPr>
             <a:r>
-              <a:rPr sz="1800" b="1" i="0">
-                <a:solidFill>
-                  <a:srgbClr val="59472C"/>
+              <a:rPr sz="800" b="1" i="0" spc="250">
+                <a:solidFill>
+                  <a:srgbClr val="8E8780"/>
                 </a:solidFill>
               </a:rPr>
-              <a:t>약속 1</a:t>
-            </a:r>
-          </a:p>
-        </p:txBody>
-      </p:sp>
-      <p:sp>
-        <p:nvSpPr>
-          <p:cNvPr id="8" name="TextBox 7"/>
+              <a:t>FAMILY ALBUM</a:t>
+            </a:r>
+          </a:p>
+        </p:txBody>
+      </p:sp>
+      <p:sp>
+        <p:nvSpPr>
+          <p:cNvPr id="2" name="Title 1"/>
+          <p:cNvSpPr>
+            <a:spLocks noGrp="1"/>
+          </p:cNvSpPr>
+          <p:nvPr>
+            <p:ph type="title"/>
+          </p:nvPr>
+        </p:nvSpPr>
+        <p:spPr>
+          <a:xfrm>
+            <a:off x="1371600" y="640080"/>
+            <a:ext cx="9448495" cy="868680"/>
+          </a:xfrm>
+        </p:spPr>
+        <p:txBody>
+          <a:bodyPr wrap="square" lIns="54864" rIns="54864" tIns="27432" bIns="27432" anchor="ctr">
+            <a:noAutofit/>
+          </a:bodyPr>
+          <a:lstStyle/>
+          <a:p>
+            <a:pPr algn="ctr">
+              <a:lnSpc>
+                <a:spcPct val="105000"/>
+              </a:lnSpc>
+            </a:pPr>
+            <a:r>
+              <a:rPr sz="3000" b="1" i="0">
+                <a:solidFill>
+                  <a:srgbClr val="26231F"/>
+                </a:solidFill>
+              </a:rPr>
+              <a:t>우리 가족의 약속</a:t>
+            </a:r>
+          </a:p>
+        </p:txBody>
+      </p:sp>
+      <p:sp>
+        <p:nvSpPr>
+          <p:cNvPr id="6" name="줄 1"/>
+          <p:cNvSpPr/>
+          <p:nvPr/>
+        </p:nvSpPr>
+        <p:spPr>
+          <a:xfrm>
+            <a:off x="640080" y="1783080"/>
+            <a:ext cx="10911535" cy="1005840"/>
+          </a:xfrm>
+          <a:prstGeom prst="roundRect">
+            <a:avLst>
+              <a:gd name="adj" fmla="val 7000"/>
+            </a:avLst>
+          </a:prstGeom>
+          <a:noFill/>
+          <a:ln w="15875">
+            <a:solidFill>
+              <a:srgbClr val="D8B279"/>
+            </a:solidFill>
+          </a:ln>
+        </p:spPr>
+        <p:txBody>
+          <a:bodyPr rtlCol="0" anchor="ctr"/>
+          <a:lstStyle/>
+          <a:p>
+            <a:pPr algn="ctr"/>
+          </a:p>
+        </p:txBody>
+      </p:sp>
+      <p:sp>
+        <p:nvSpPr>
+          <p:cNvPr id="7" name="번호 1"/>
           <p:cNvSpPr txBox="1"/>
           <p:nvPr/>
         </p:nvSpPr>
         <p:spPr>
           <a:xfrm>
-            <a:off x="4297680" y="1600200"/>
-            <a:ext cx="7071055" cy="914400"/>
+            <a:off x="731519" y="2011680"/>
+            <a:ext cx="914400" cy="548640"/>
           </a:xfrm>
           <a:prstGeom prst="rect">
             <a:avLst/>
@@ -5004,101 +5127,25 @@
               </a:lnSpc>
             </a:pPr>
             <a:r>
-              <a:rPr sz="1700" b="0" i="0">
-                <a:solidFill>
-                  <a:srgbClr val="2B2B2B"/>
+              <a:rPr sz="2400" b="1" i="0">
+                <a:solidFill>
+                  <a:srgbClr val="D8B279"/>
                 </a:solidFill>
               </a:rPr>
-              <a:t>나를 위한 밥상 차리기</a:t>
-            </a:r>
-          </a:p>
-        </p:txBody>
-      </p:sp>
-      <p:sp>
-        <p:nvSpPr>
-          <p:cNvPr id="9" name="줄 2"/>
-          <p:cNvSpPr/>
-          <p:nvPr/>
-        </p:nvSpPr>
-        <p:spPr>
-          <a:xfrm>
-            <a:off x="640080" y="2697480"/>
-            <a:ext cx="10911535" cy="1005840"/>
-          </a:xfrm>
-          <a:prstGeom prst="roundRect">
-            <a:avLst>
-              <a:gd name="adj" fmla="val 8000"/>
-            </a:avLst>
-          </a:prstGeom>
-          <a:solidFill>
-            <a:srgbClr val="F8F5F1"/>
-          </a:solidFill>
-          <a:ln w="12700">
-            <a:solidFill>
-              <a:srgbClr val="ECE3D4"/>
-            </a:solidFill>
-          </a:ln>
-        </p:spPr>
-        <p:txBody>
-          <a:bodyPr rtlCol="0" anchor="ctr"/>
-          <a:lstStyle/>
-          <a:p>
-            <a:pPr algn="ctr"/>
-          </a:p>
-        </p:txBody>
-      </p:sp>
-      <p:sp>
-        <p:nvSpPr>
-          <p:cNvPr id="10" name="번호 2"/>
-          <p:cNvSpPr/>
-          <p:nvPr/>
-        </p:nvSpPr>
-        <p:spPr>
-          <a:xfrm>
-            <a:off x="822959" y="2971800"/>
-            <a:ext cx="457200" cy="457200"/>
-          </a:xfrm>
-          <a:prstGeom prst="ellipse">
-            <a:avLst/>
-          </a:prstGeom>
-          <a:solidFill>
-            <a:srgbClr val="9D7D4D"/>
-          </a:solidFill>
-          <a:ln>
-            <a:noFill/>
-          </a:ln>
-        </p:spPr>
-        <p:txBody>
-          <a:bodyPr rtlCol="0" anchor="ctr" wrap="square" lIns="54864" rIns="54864" tIns="27432" bIns="27432">
-            <a:noAutofit/>
-          </a:bodyPr>
-          <a:lstStyle/>
-          <a:p>
-            <a:pPr algn="ctr">
-              <a:lnSpc>
-                <a:spcPct val="100000"/>
-              </a:lnSpc>
-            </a:pPr>
-            <a:r>
-              <a:rPr sz="1600" b="1" i="0">
-                <a:solidFill>
-                  <a:srgbClr val="FFFFFF"/>
-                </a:solidFill>
-              </a:rPr>
-              <a:t>2</a:t>
-            </a:r>
-          </a:p>
-        </p:txBody>
-      </p:sp>
-      <p:sp>
-        <p:nvSpPr>
-          <p:cNvPr id="11" name="TextBox 10"/>
+              <a:t>01</a:t>
+            </a:r>
+          </a:p>
+        </p:txBody>
+      </p:sp>
+      <p:sp>
+        <p:nvSpPr>
+          <p:cNvPr id="8" name="TextBox 7"/>
           <p:cNvSpPr txBox="1"/>
           <p:nvPr/>
         </p:nvSpPr>
         <p:spPr>
           <a:xfrm>
-            <a:off x="1508760" y="2743200"/>
+            <a:off x="1508760" y="1828800"/>
             <a:ext cx="2743200" cy="914400"/>
           </a:xfrm>
           <a:prstGeom prst="rect">
@@ -5120,23 +5167,23 @@
             <a:r>
               <a:rPr sz="1800" b="1" i="0">
                 <a:solidFill>
-                  <a:srgbClr val="59472C"/>
+                  <a:srgbClr val="493B27"/>
                 </a:solidFill>
               </a:rPr>
-              <a:t>약속 2</a:t>
-            </a:r>
-          </a:p>
-        </p:txBody>
-      </p:sp>
-      <p:sp>
-        <p:nvSpPr>
-          <p:cNvPr id="12" name="TextBox 11"/>
+              <a:t>약속 1</a:t>
+            </a:r>
+          </a:p>
+        </p:txBody>
+      </p:sp>
+      <p:sp>
+        <p:nvSpPr>
+          <p:cNvPr id="9" name="TextBox 8"/>
           <p:cNvSpPr txBox="1"/>
           <p:nvPr/>
         </p:nvSpPr>
         <p:spPr>
           <a:xfrm>
-            <a:off x="4297680" y="2743200"/>
+            <a:off x="4297680" y="1828800"/>
             <a:ext cx="7071055" cy="914400"/>
           </a:xfrm>
           <a:prstGeom prst="rect">
@@ -5158,36 +5205,34 @@
             <a:r>
               <a:rPr sz="1700" b="0" i="0">
                 <a:solidFill>
-                  <a:srgbClr val="2B2B2B"/>
+                  <a:srgbClr val="26231F"/>
                 </a:solidFill>
               </a:rPr>
-              <a:t>하루 십 분 나에게 쓰는 시간</a:t>
-            </a:r>
-          </a:p>
-        </p:txBody>
-      </p:sp>
-      <p:sp>
-        <p:nvSpPr>
-          <p:cNvPr id="13" name="줄 3"/>
+              <a:t>나를 위한 밥상 차리기</a:t>
+            </a:r>
+          </a:p>
+        </p:txBody>
+      </p:sp>
+      <p:sp>
+        <p:nvSpPr>
+          <p:cNvPr id="10" name="줄 2"/>
           <p:cNvSpPr/>
           <p:nvPr/>
         </p:nvSpPr>
         <p:spPr>
           <a:xfrm>
-            <a:off x="640080" y="3840480"/>
+            <a:off x="640080" y="2926080"/>
             <a:ext cx="10911535" cy="1005840"/>
           </a:xfrm>
           <a:prstGeom prst="roundRect">
             <a:avLst>
-              <a:gd name="adj" fmla="val 8000"/>
+              <a:gd name="adj" fmla="val 7000"/>
             </a:avLst>
           </a:prstGeom>
-          <a:solidFill>
-            <a:srgbClr val="F8F5F1"/>
-          </a:solidFill>
-          <a:ln w="12700">
+          <a:noFill/>
+          <a:ln w="15875">
             <a:solidFill>
-              <a:srgbClr val="ECE3D4"/>
+              <a:srgbClr val="D8B279"/>
             </a:solidFill>
           </a:ln>
         </p:spPr>
@@ -5201,57 +5246,14 @@
       </p:sp>
       <p:sp>
         <p:nvSpPr>
-          <p:cNvPr id="14" name="번호 3"/>
-          <p:cNvSpPr/>
-          <p:nvPr/>
-        </p:nvSpPr>
-        <p:spPr>
-          <a:xfrm>
-            <a:off x="822959" y="4114800"/>
-            <a:ext cx="457200" cy="457200"/>
-          </a:xfrm>
-          <a:prstGeom prst="ellipse">
-            <a:avLst/>
-          </a:prstGeom>
-          <a:solidFill>
-            <a:srgbClr val="9D7D4D"/>
-          </a:solidFill>
-          <a:ln>
-            <a:noFill/>
-          </a:ln>
-        </p:spPr>
-        <p:txBody>
-          <a:bodyPr rtlCol="0" anchor="ctr" wrap="square" lIns="54864" rIns="54864" tIns="27432" bIns="27432">
-            <a:noAutofit/>
-          </a:bodyPr>
-          <a:lstStyle/>
-          <a:p>
-            <a:pPr algn="ctr">
-              <a:lnSpc>
-                <a:spcPct val="100000"/>
-              </a:lnSpc>
-            </a:pPr>
-            <a:r>
-              <a:rPr sz="1600" b="1" i="0">
-                <a:solidFill>
-                  <a:srgbClr val="FFFFFF"/>
-                </a:solidFill>
-              </a:rPr>
-              <a:t>3</a:t>
-            </a:r>
-          </a:p>
-        </p:txBody>
-      </p:sp>
-      <p:sp>
-        <p:nvSpPr>
-          <p:cNvPr id="15" name="TextBox 14"/>
+          <p:cNvPr id="11" name="번호 2"/>
           <p:cNvSpPr txBox="1"/>
           <p:nvPr/>
         </p:nvSpPr>
         <p:spPr>
           <a:xfrm>
-            <a:off x="1508760" y="3886200"/>
-            <a:ext cx="2743200" cy="914400"/>
+            <a:off x="731519" y="3154680"/>
+            <a:ext cx="914400" cy="548640"/>
           </a:xfrm>
           <a:prstGeom prst="rect">
             <a:avLst/>
@@ -5270,26 +5272,26 @@
               </a:lnSpc>
             </a:pPr>
             <a:r>
-              <a:rPr sz="1800" b="1" i="0">
-                <a:solidFill>
-                  <a:srgbClr val="59472C"/>
+              <a:rPr sz="2400" b="1" i="0">
+                <a:solidFill>
+                  <a:srgbClr val="D8B279"/>
                 </a:solidFill>
               </a:rPr>
-              <a:t>약속 3</a:t>
-            </a:r>
-          </a:p>
-        </p:txBody>
-      </p:sp>
-      <p:sp>
-        <p:nvSpPr>
-          <p:cNvPr id="16" name="TextBox 15"/>
+              <a:t>02</a:t>
+            </a:r>
+          </a:p>
+        </p:txBody>
+      </p:sp>
+      <p:sp>
+        <p:nvSpPr>
+          <p:cNvPr id="12" name="TextBox 11"/>
           <p:cNvSpPr txBox="1"/>
           <p:nvPr/>
         </p:nvSpPr>
         <p:spPr>
           <a:xfrm>
-            <a:off x="4297680" y="3886200"/>
-            <a:ext cx="7071055" cy="914400"/>
+            <a:off x="1508760" y="2971800"/>
+            <a:ext cx="2743200" cy="914400"/>
           </a:xfrm>
           <a:prstGeom prst="rect">
             <a:avLst/>
@@ -5308,9 +5310,192 @@
               </a:lnSpc>
             </a:pPr>
             <a:r>
+              <a:rPr sz="1800" b="1" i="0">
+                <a:solidFill>
+                  <a:srgbClr val="493B27"/>
+                </a:solidFill>
+              </a:rPr>
+              <a:t>약속 2</a:t>
+            </a:r>
+          </a:p>
+        </p:txBody>
+      </p:sp>
+      <p:sp>
+        <p:nvSpPr>
+          <p:cNvPr id="13" name="TextBox 12"/>
+          <p:cNvSpPr txBox="1"/>
+          <p:nvPr/>
+        </p:nvSpPr>
+        <p:spPr>
+          <a:xfrm>
+            <a:off x="4297680" y="2971800"/>
+            <a:ext cx="7071055" cy="914400"/>
+          </a:xfrm>
+          <a:prstGeom prst="rect">
+            <a:avLst/>
+          </a:prstGeom>
+          <a:noFill/>
+        </p:spPr>
+        <p:txBody>
+          <a:bodyPr wrap="square" lIns="54864" rIns="54864" tIns="27432" bIns="27432" anchor="ctr">
+            <a:noAutofit/>
+          </a:bodyPr>
+          <a:lstStyle/>
+          <a:p>
+            <a:pPr algn="l">
+              <a:lnSpc>
+                <a:spcPct val="115000"/>
+              </a:lnSpc>
+            </a:pPr>
+            <a:r>
               <a:rPr sz="1700" b="0" i="0">
                 <a:solidFill>
-                  <a:srgbClr val="2B2B2B"/>
+                  <a:srgbClr val="26231F"/>
+                </a:solidFill>
+              </a:rPr>
+              <a:t>하루 십 분 나에게 쓰는 시간</a:t>
+            </a:r>
+          </a:p>
+        </p:txBody>
+      </p:sp>
+      <p:sp>
+        <p:nvSpPr>
+          <p:cNvPr id="14" name="줄 3"/>
+          <p:cNvSpPr/>
+          <p:nvPr/>
+        </p:nvSpPr>
+        <p:spPr>
+          <a:xfrm>
+            <a:off x="640080" y="4069080"/>
+            <a:ext cx="10911535" cy="1005840"/>
+          </a:xfrm>
+          <a:prstGeom prst="roundRect">
+            <a:avLst>
+              <a:gd name="adj" fmla="val 7000"/>
+            </a:avLst>
+          </a:prstGeom>
+          <a:noFill/>
+          <a:ln w="15875">
+            <a:solidFill>
+              <a:srgbClr val="D8B279"/>
+            </a:solidFill>
+          </a:ln>
+        </p:spPr>
+        <p:txBody>
+          <a:bodyPr rtlCol="0" anchor="ctr"/>
+          <a:lstStyle/>
+          <a:p>
+            <a:pPr algn="ctr"/>
+          </a:p>
+        </p:txBody>
+      </p:sp>
+      <p:sp>
+        <p:nvSpPr>
+          <p:cNvPr id="15" name="번호 3"/>
+          <p:cNvSpPr txBox="1"/>
+          <p:nvPr/>
+        </p:nvSpPr>
+        <p:spPr>
+          <a:xfrm>
+            <a:off x="731519" y="4297680"/>
+            <a:ext cx="914400" cy="548640"/>
+          </a:xfrm>
+          <a:prstGeom prst="rect">
+            <a:avLst/>
+          </a:prstGeom>
+          <a:noFill/>
+        </p:spPr>
+        <p:txBody>
+          <a:bodyPr wrap="square" lIns="54864" rIns="54864" tIns="27432" bIns="27432" anchor="ctr">
+            <a:noAutofit/>
+          </a:bodyPr>
+          <a:lstStyle/>
+          <a:p>
+            <a:pPr algn="l">
+              <a:lnSpc>
+                <a:spcPct val="115000"/>
+              </a:lnSpc>
+            </a:pPr>
+            <a:r>
+              <a:rPr sz="2400" b="1" i="0">
+                <a:solidFill>
+                  <a:srgbClr val="D8B279"/>
+                </a:solidFill>
+              </a:rPr>
+              <a:t>03</a:t>
+            </a:r>
+          </a:p>
+        </p:txBody>
+      </p:sp>
+      <p:sp>
+        <p:nvSpPr>
+          <p:cNvPr id="16" name="TextBox 15"/>
+          <p:cNvSpPr txBox="1"/>
+          <p:nvPr/>
+        </p:nvSpPr>
+        <p:spPr>
+          <a:xfrm>
+            <a:off x="1508760" y="4114800"/>
+            <a:ext cx="2743200" cy="914400"/>
+          </a:xfrm>
+          <a:prstGeom prst="rect">
+            <a:avLst/>
+          </a:prstGeom>
+          <a:noFill/>
+        </p:spPr>
+        <p:txBody>
+          <a:bodyPr wrap="square" lIns="54864" rIns="54864" tIns="27432" bIns="27432" anchor="ctr">
+            <a:noAutofit/>
+          </a:bodyPr>
+          <a:lstStyle/>
+          <a:p>
+            <a:pPr algn="l">
+              <a:lnSpc>
+                <a:spcPct val="115000"/>
+              </a:lnSpc>
+            </a:pPr>
+            <a:r>
+              <a:rPr sz="1800" b="1" i="0">
+                <a:solidFill>
+                  <a:srgbClr val="493B27"/>
+                </a:solidFill>
+              </a:rPr>
+              <a:t>약속 3</a:t>
+            </a:r>
+          </a:p>
+        </p:txBody>
+      </p:sp>
+      <p:sp>
+        <p:nvSpPr>
+          <p:cNvPr id="17" name="TextBox 16"/>
+          <p:cNvSpPr txBox="1"/>
+          <p:nvPr/>
+        </p:nvSpPr>
+        <p:spPr>
+          <a:xfrm>
+            <a:off x="4297680" y="4114800"/>
+            <a:ext cx="7071055" cy="914400"/>
+          </a:xfrm>
+          <a:prstGeom prst="rect">
+            <a:avLst/>
+          </a:prstGeom>
+          <a:noFill/>
+        </p:spPr>
+        <p:txBody>
+          <a:bodyPr wrap="square" lIns="54864" rIns="54864" tIns="27432" bIns="27432" anchor="ctr">
+            <a:noAutofit/>
+          </a:bodyPr>
+          <a:lstStyle/>
+          <a:p>
+            <a:pPr algn="l">
+              <a:lnSpc>
+                <a:spcPct val="115000"/>
+              </a:lnSpc>
+            </a:pPr>
+            <a:r>
+              <a:rPr sz="1700" b="0" i="0">
+                <a:solidFill>
+                  <a:srgbClr val="26231F"/>
                 </a:solidFill>
               </a:rPr>
               <a:t>안부를 전할 사람 한 명 챙기기</a:t>
@@ -5332,7 +5517,7 @@
     <p:bg>
       <p:bgPr>
         <a:solidFill>
-          <a:srgbClr val="FFFFFF"/>
+          <a:srgbClr val="F6E9D5"/>
         </a:solidFill>
         <a:effectLst/>
       </p:bgPr>
@@ -5346,20 +5531,20 @@
       <p:grpSpPr/>
       <p:sp>
         <p:nvSpPr>
-          <p:cNvPr id="3" name="장식"/>
+          <p:cNvPr id="3" name="포인트"/>
           <p:cNvSpPr/>
           <p:nvPr/>
         </p:nvSpPr>
         <p:spPr>
           <a:xfrm>
-            <a:off x="-182880" y="6144768"/>
-            <a:ext cx="12557455" cy="731520"/>
-          </a:xfrm>
-          <a:prstGeom prst="wave">
+            <a:off x="5958687" y="246888"/>
+            <a:ext cx="274320" cy="274320"/>
+          </a:xfrm>
+          <a:prstGeom prst="donut">
             <a:avLst/>
           </a:prstGeom>
           <a:solidFill>
-            <a:srgbClr val="ECE3D4"/>
+            <a:srgbClr val="D8B279"/>
           </a:solidFill>
           <a:ln>
             <a:noFill/>
@@ -5381,14 +5566,14 @@
         </p:nvSpPr>
         <p:spPr>
           <a:xfrm>
-            <a:off x="-182880" y="6400800"/>
-            <a:ext cx="12557455" cy="502920"/>
-          </a:xfrm>
-          <a:prstGeom prst="wave">
+            <a:off x="5684367" y="1572768"/>
+            <a:ext cx="822960" cy="22860"/>
+          </a:xfrm>
+          <a:prstGeom prst="rect">
             <a:avLst/>
           </a:prstGeom>
           <a:solidFill>
-            <a:srgbClr val="9D7D4D"/>
+            <a:srgbClr val="D8B279"/>
           </a:solidFill>
           <a:ln>
             <a:noFill/>
@@ -5404,19 +5589,19 @@
       </p:sp>
       <p:sp>
         <p:nvSpPr>
-          <p:cNvPr id="2" name="Title 1"/>
-          <p:cNvSpPr>
-            <a:spLocks noGrp="1"/>
-          </p:cNvSpPr>
-          <p:nvPr>
-            <p:ph type="title"/>
-          </p:nvPr>
-        </p:nvSpPr>
-        <p:spPr>
-          <a:xfrm>
-            <a:off x="640080" y="457200"/>
-            <a:ext cx="9722815" cy="868680"/>
-          </a:xfrm>
+          <p:cNvPr id="5" name="상단 라벨"/>
+          <p:cNvSpPr txBox="1"/>
+          <p:nvPr/>
+        </p:nvSpPr>
+        <p:spPr>
+          <a:xfrm>
+            <a:off x="640080" y="182880"/>
+            <a:ext cx="3657600" cy="274320"/>
+          </a:xfrm>
+          <a:prstGeom prst="rect">
+            <a:avLst/>
+          </a:prstGeom>
+          <a:noFill/>
         </p:spPr>
         <p:txBody>
           <a:bodyPr wrap="square" lIns="54864" rIns="54864" tIns="27432" bIns="27432" anchor="ctr">
@@ -5425,6 +5610,44 @@
           <a:lstStyle/>
           <a:p>
             <a:pPr algn="l">
+              <a:lnSpc>
+                <a:spcPct val="115000"/>
+              </a:lnSpc>
+            </a:pPr>
+            <a:r>
+              <a:rPr sz="800" b="1" i="0" spc="250">
+                <a:solidFill>
+                  <a:srgbClr val="8E8780"/>
+                </a:solidFill>
+              </a:rPr>
+              <a:t>FAMILY ALBUM</a:t>
+            </a:r>
+          </a:p>
+        </p:txBody>
+      </p:sp>
+      <p:sp>
+        <p:nvSpPr>
+          <p:cNvPr id="2" name="Title 1"/>
+          <p:cNvSpPr>
+            <a:spLocks noGrp="1"/>
+          </p:cNvSpPr>
+          <p:nvPr>
+            <p:ph type="title"/>
+          </p:nvPr>
+        </p:nvSpPr>
+        <p:spPr>
+          <a:xfrm>
+            <a:off x="1371600" y="640080"/>
+            <a:ext cx="9448495" cy="868680"/>
+          </a:xfrm>
+        </p:spPr>
+        <p:txBody>
+          <a:bodyPr wrap="square" lIns="54864" rIns="54864" tIns="27432" bIns="27432" anchor="ctr">
+            <a:noAutofit/>
+          </a:bodyPr>
+          <a:lstStyle/>
+          <a:p>
+            <a:pPr algn="ctr">
               <a:lnSpc>
                 <a:spcPct val="105000"/>
               </a:lnSpc>
@@ -5432,7 +5655,7 @@
             <a:r>
               <a:rPr sz="3000" b="1" i="0">
                 <a:solidFill>
-                  <a:srgbClr val="59472C"/>
+                  <a:srgbClr val="26231F"/>
                 </a:solidFill>
               </a:rPr>
               <a:t>가족 사진</a:t>
@@ -5442,14 +5665,14 @@
       </p:sp>
       <p:sp>
         <p:nvSpPr>
-          <p:cNvPr id="5" name="사진 자리"/>
+          <p:cNvPr id="6" name="사진 자리"/>
           <p:cNvSpPr/>
           <p:nvPr/>
         </p:nvSpPr>
         <p:spPr>
           <a:xfrm>
-            <a:off x="640080" y="1554480"/>
-            <a:ext cx="3515258" cy="2103120"/>
+            <a:off x="640080" y="1783080"/>
+            <a:ext cx="3515258" cy="2194560"/>
           </a:xfrm>
           <a:prstGeom prst="roundRect">
             <a:avLst>
@@ -5457,12 +5680,10 @@
             </a:avLst>
           </a:prstGeom>
           <a:solidFill>
-            <a:srgbClr val="ECE3D4"/>
+            <a:srgbClr val="F6E9D5"/>
           </a:solidFill>
           <a:ln w="19050">
-            <a:solidFill>
-              <a:srgbClr val="9D7D4D"/>
-            </a:solidFill>
+            <a:noFill/>
             <a:prstDash val="dash"/>
           </a:ln>
         </p:spPr>
@@ -5480,7 +5701,7 @@
             <a:r>
               <a:rPr sz="1200" b="0" i="0">
                 <a:solidFill>
-                  <a:srgbClr val="59472C"/>
+                  <a:srgbClr val="8E8780"/>
                 </a:solidFill>
               </a:rPr>
               <a:t>사진 1</a:t>
@@ -5490,14 +5711,14 @@
       </p:sp>
       <p:sp>
         <p:nvSpPr>
-          <p:cNvPr id="6" name="사진 자리"/>
+          <p:cNvPr id="7" name="사진 자리"/>
           <p:cNvSpPr/>
           <p:nvPr/>
         </p:nvSpPr>
         <p:spPr>
           <a:xfrm>
-            <a:off x="4338218" y="1554480"/>
-            <a:ext cx="3515258" cy="2103120"/>
+            <a:off x="4338218" y="1783080"/>
+            <a:ext cx="3515258" cy="2194560"/>
           </a:xfrm>
           <a:prstGeom prst="roundRect">
             <a:avLst>
@@ -5505,12 +5726,10 @@
             </a:avLst>
           </a:prstGeom>
           <a:solidFill>
-            <a:srgbClr val="ECE3D4"/>
+            <a:srgbClr val="F6E9D5"/>
           </a:solidFill>
           <a:ln w="19050">
-            <a:solidFill>
-              <a:srgbClr val="9D7D4D"/>
-            </a:solidFill>
+            <a:noFill/>
             <a:prstDash val="dash"/>
           </a:ln>
         </p:spPr>
@@ -5528,7 +5747,7 @@
             <a:r>
               <a:rPr sz="1200" b="0" i="0">
                 <a:solidFill>
-                  <a:srgbClr val="59472C"/>
+                  <a:srgbClr val="8E8780"/>
                 </a:solidFill>
               </a:rPr>
               <a:t>사진 2</a:t>
@@ -5538,14 +5757,14 @@
       </p:sp>
       <p:sp>
         <p:nvSpPr>
-          <p:cNvPr id="7" name="사진 자리"/>
+          <p:cNvPr id="8" name="사진 자리"/>
           <p:cNvSpPr/>
           <p:nvPr/>
         </p:nvSpPr>
         <p:spPr>
           <a:xfrm>
-            <a:off x="8036356" y="1554480"/>
-            <a:ext cx="3515258" cy="2103120"/>
+            <a:off x="8036356" y="1783080"/>
+            <a:ext cx="3515258" cy="2194560"/>
           </a:xfrm>
           <a:prstGeom prst="roundRect">
             <a:avLst>
@@ -5553,12 +5772,10 @@
             </a:avLst>
           </a:prstGeom>
           <a:solidFill>
-            <a:srgbClr val="ECE3D4"/>
+            <a:srgbClr val="F6E9D5"/>
           </a:solidFill>
           <a:ln w="19050">
-            <a:solidFill>
-              <a:srgbClr val="9D7D4D"/>
-            </a:solidFill>
+            <a:noFill/>
             <a:prstDash val="dash"/>
           </a:ln>
         </p:spPr>
@@ -5576,7 +5793,7 @@
             <a:r>
               <a:rPr sz="1200" b="0" i="0">
                 <a:solidFill>
-                  <a:srgbClr val="59472C"/>
+                  <a:srgbClr val="8E8780"/>
                 </a:solidFill>
               </a:rPr>
               <a:t>사진 3</a:t>
@@ -5586,14 +5803,14 @@
       </p:sp>
       <p:sp>
         <p:nvSpPr>
-          <p:cNvPr id="8" name="사진 자리"/>
+          <p:cNvPr id="9" name="사진 자리"/>
           <p:cNvSpPr/>
           <p:nvPr/>
         </p:nvSpPr>
         <p:spPr>
           <a:xfrm>
-            <a:off x="640080" y="3840480"/>
-            <a:ext cx="3515258" cy="2103120"/>
+            <a:off x="640080" y="4160520"/>
+            <a:ext cx="3515258" cy="2194560"/>
           </a:xfrm>
           <a:prstGeom prst="roundRect">
             <a:avLst>
@@ -5601,12 +5818,10 @@
             </a:avLst>
           </a:prstGeom>
           <a:solidFill>
-            <a:srgbClr val="ECE3D4"/>
+            <a:srgbClr val="F6E9D5"/>
           </a:solidFill>
           <a:ln w="19050">
-            <a:solidFill>
-              <a:srgbClr val="9D7D4D"/>
-            </a:solidFill>
+            <a:noFill/>
             <a:prstDash val="dash"/>
           </a:ln>
         </p:spPr>
@@ -5624,7 +5839,7 @@
             <a:r>
               <a:rPr sz="1200" b="0" i="0">
                 <a:solidFill>
-                  <a:srgbClr val="59472C"/>
+                  <a:srgbClr val="8E8780"/>
                 </a:solidFill>
               </a:rPr>
               <a:t>사진 4</a:t>
@@ -5634,14 +5849,14 @@
       </p:sp>
       <p:sp>
         <p:nvSpPr>
-          <p:cNvPr id="9" name="사진 자리"/>
+          <p:cNvPr id="10" name="사진 자리"/>
           <p:cNvSpPr/>
           <p:nvPr/>
         </p:nvSpPr>
         <p:spPr>
           <a:xfrm>
-            <a:off x="4338218" y="3840480"/>
-            <a:ext cx="3515258" cy="2103120"/>
+            <a:off x="4338218" y="4160520"/>
+            <a:ext cx="3515258" cy="2194560"/>
           </a:xfrm>
           <a:prstGeom prst="roundRect">
             <a:avLst>
@@ -5649,12 +5864,10 @@
             </a:avLst>
           </a:prstGeom>
           <a:solidFill>
-            <a:srgbClr val="ECE3D4"/>
+            <a:srgbClr val="F6E9D5"/>
           </a:solidFill>
           <a:ln w="19050">
-            <a:solidFill>
-              <a:srgbClr val="9D7D4D"/>
-            </a:solidFill>
+            <a:noFill/>
             <a:prstDash val="dash"/>
           </a:ln>
         </p:spPr>
@@ -5672,7 +5885,7 @@
             <a:r>
               <a:rPr sz="1200" b="0" i="0">
                 <a:solidFill>
-                  <a:srgbClr val="59472C"/>
+                  <a:srgbClr val="8E8780"/>
                 </a:solidFill>
               </a:rPr>
               <a:t>사진 5</a:t>
@@ -5682,14 +5895,14 @@
       </p:sp>
       <p:sp>
         <p:nvSpPr>
-          <p:cNvPr id="10" name="사진 자리"/>
+          <p:cNvPr id="11" name="사진 자리"/>
           <p:cNvSpPr/>
           <p:nvPr/>
         </p:nvSpPr>
         <p:spPr>
           <a:xfrm>
-            <a:off x="8036356" y="3840480"/>
-            <a:ext cx="3515258" cy="2103120"/>
+            <a:off x="8036356" y="4160520"/>
+            <a:ext cx="3515258" cy="2194560"/>
           </a:xfrm>
           <a:prstGeom prst="roundRect">
             <a:avLst>
@@ -5697,12 +5910,10 @@
             </a:avLst>
           </a:prstGeom>
           <a:solidFill>
-            <a:srgbClr val="ECE3D4"/>
+            <a:srgbClr val="F6E9D5"/>
           </a:solidFill>
           <a:ln w="19050">
-            <a:solidFill>
-              <a:srgbClr val="9D7D4D"/>
-            </a:solidFill>
+            <a:noFill/>
             <a:prstDash val="dash"/>
           </a:ln>
         </p:spPr>
@@ -5720,7 +5931,7 @@
             <a:r>
               <a:rPr sz="1200" b="0" i="0">
                 <a:solidFill>
-                  <a:srgbClr val="59472C"/>
+                  <a:srgbClr val="8E8780"/>
                 </a:solidFill>
               </a:rPr>
               <a:t>사진 6</a:t>
@@ -5739,6 +5950,14 @@
 <file path=ppt/slides/slide6.xml><?xml version="1.0" encoding="utf-8"?>
 <p:sld xmlns:a="http://schemas.openxmlformats.org/drawingml/2006/main" xmlns:p="http://schemas.openxmlformats.org/presentationml/2006/main" xmlns:r="http://schemas.openxmlformats.org/officeDocument/2006/relationships">
   <p:cSld>
+    <p:bg>
+      <p:bgPr>
+        <a:solidFill>
+          <a:srgbClr val="FBF5EC"/>
+        </a:solidFill>
+        <a:effectLst/>
+      </p:bgPr>
+    </p:bg>
     <p:spTree>
       <p:nvGrpSpPr>
         <p:cNvPr id="1" name=""/>
@@ -5746,30 +5965,120 @@
         <p:nvPr/>
       </p:nvGrpSpPr>
       <p:grpSpPr/>
-      <p:pic>
-        <p:nvPicPr>
-          <p:cNvPr id="3" name="표지 그림" descr="family-29.jpg"/>
-          <p:cNvPicPr>
-            <a:picLocks noChangeAspect="1"/>
-          </p:cNvPicPr>
+      <p:sp>
+        <p:nvSpPr>
+          <p:cNvPr id="3" name="사진 자리"/>
+          <p:cNvSpPr/>
           <p:nvPr/>
-        </p:nvPicPr>
-        <p:blipFill>
-          <a:blip r:embed="rId2"/>
-          <a:stretch>
-            <a:fillRect/>
-          </a:stretch>
-        </p:blipFill>
-        <p:spPr>
-          <a:xfrm>
-            <a:off x="0" y="0"/>
-            <a:ext cx="12191695" cy="6858000"/>
+        </p:nvSpPr>
+        <p:spPr>
+          <a:xfrm>
+            <a:off x="1463003" y="960120"/>
+            <a:ext cx="3657508" cy="4526280"/>
+          </a:xfrm>
+          <a:prstGeom prst="roundRect">
+            <a:avLst>
+              <a:gd name="adj" fmla="val 4000"/>
+            </a:avLst>
+          </a:prstGeom>
+          <a:solidFill>
+            <a:srgbClr val="EBD2AD"/>
+          </a:solidFill>
+          <a:ln>
+            <a:noFill/>
+          </a:ln>
+        </p:spPr>
+        <p:txBody>
+          <a:bodyPr rtlCol="0" anchor="ctr" wrap="square" lIns="54864" rIns="54864" tIns="27432" bIns="27432">
+            <a:noAutofit/>
+          </a:bodyPr>
+          <a:lstStyle/>
+          <a:p>
+            <a:pPr algn="ctr">
+              <a:lnSpc>
+                <a:spcPct val="100000"/>
+              </a:lnSpc>
+            </a:pPr>
+            <a:r>
+              <a:rPr sz="1400" b="0" i="0">
+                <a:solidFill>
+                  <a:srgbClr val="493B27"/>
+                </a:solidFill>
+              </a:rPr>
+              <a:t>사진을 넣어 주세요</a:t>
+            </a:r>
+          </a:p>
+        </p:txBody>
+      </p:sp>
+      <p:sp>
+        <p:nvSpPr>
+          <p:cNvPr id="4" name="장식"/>
+          <p:cNvSpPr/>
+          <p:nvPr/>
+        </p:nvSpPr>
+        <p:spPr>
+          <a:xfrm>
+            <a:off x="975335" y="1234439"/>
+            <a:ext cx="3657508" cy="4526280"/>
+          </a:xfrm>
+          <a:prstGeom prst="roundRect">
+            <a:avLst>
+              <a:gd name="adj" fmla="val 4000"/>
+            </a:avLst>
+          </a:prstGeom>
+          <a:noFill/>
+          <a:ln w="9525">
+            <a:solidFill>
+              <a:srgbClr val="26231F"/>
+            </a:solidFill>
+          </a:ln>
+        </p:spPr>
+        <p:txBody>
+          <a:bodyPr rtlCol="0" anchor="ctr"/>
+          <a:lstStyle/>
+          <a:p>
+            <a:pPr algn="ctr"/>
+          </a:p>
+        </p:txBody>
+      </p:sp>
+      <p:sp>
+        <p:nvSpPr>
+          <p:cNvPr id="5" name="라벨"/>
+          <p:cNvSpPr txBox="1"/>
+          <p:nvPr/>
+        </p:nvSpPr>
+        <p:spPr>
+          <a:xfrm>
+            <a:off x="6827349" y="2148840"/>
+            <a:ext cx="4632844" cy="274320"/>
           </a:xfrm>
           <a:prstGeom prst="rect">
             <a:avLst/>
           </a:prstGeom>
-        </p:spPr>
-      </p:pic>
+          <a:noFill/>
+        </p:spPr>
+        <p:txBody>
+          <a:bodyPr wrap="square" lIns="54864" rIns="54864" tIns="27432" bIns="27432" anchor="t">
+            <a:noAutofit/>
+          </a:bodyPr>
+          <a:lstStyle/>
+          <a:p>
+            <a:pPr algn="l">
+              <a:lnSpc>
+                <a:spcPct val="115000"/>
+              </a:lnSpc>
+            </a:pPr>
+            <a:r>
+              <a:rPr sz="1000" b="1" i="0" spc="250">
+                <a:solidFill>
+                  <a:srgbClr val="26231F"/>
+                </a:solidFill>
+              </a:rPr>
+              <a:t>FAMILY ALBUM</a:t>
+            </a:r>
+          </a:p>
+        </p:txBody>
+      </p:sp>
       <p:sp>
         <p:nvSpPr>
           <p:cNvPr id="2" name="Title 1"/>
@@ -5782,8 +6091,8 @@
         </p:nvSpPr>
         <p:spPr>
           <a:xfrm>
-            <a:off x="853418" y="2057400"/>
-            <a:ext cx="6095847" cy="1554480"/>
+            <a:off x="6827349" y="2606040"/>
+            <a:ext cx="4632844" cy="1188720"/>
           </a:xfrm>
         </p:spPr>
         <p:txBody>
@@ -5798,9 +6107,9 @@
               </a:lnSpc>
             </a:pPr>
             <a:r>
-              <a:rPr sz="3600" b="1" i="0">
-                <a:solidFill>
-                  <a:srgbClr val="59472C"/>
+              <a:rPr sz="4000" b="1" i="0">
+                <a:solidFill>
+                  <a:srgbClr val="26231F"/>
                 </a:solidFill>
               </a:rPr>
               <a:t>우리 가족 소개를 마칩니다</a:t>
@@ -5810,14 +6119,14 @@
       </p:sp>
       <p:sp>
         <p:nvSpPr>
-          <p:cNvPr id="4" name="한 줄 문구"/>
+          <p:cNvPr id="6" name="한 줄 문구"/>
           <p:cNvSpPr txBox="1"/>
           <p:nvPr/>
         </p:nvSpPr>
         <p:spPr>
           <a:xfrm>
-            <a:off x="853418" y="3749039"/>
-            <a:ext cx="6095847" cy="822960"/>
+            <a:off x="6827349" y="3886200"/>
+            <a:ext cx="4632844" cy="822960"/>
           </a:xfrm>
           <a:prstGeom prst="rect">
             <a:avLst/>
@@ -5836,9 +6145,9 @@
               </a:lnSpc>
             </a:pPr>
             <a:r>
-              <a:rPr sz="1700" b="0" i="1">
-                <a:solidFill>
-                  <a:srgbClr val="59472C"/>
+              <a:rPr sz="1700" b="0" i="0">
+                <a:solidFill>
+                  <a:srgbClr val="26231F"/>
                 </a:solidFill>
               </a:rPr>
               <a:t>읽어 주셔서 고맙습니다</a:t>
@@ -5848,14 +6157,14 @@
       </p:sp>
       <p:sp>
         <p:nvSpPr>
-          <p:cNvPr id="5" name="안내 문구"/>
+          <p:cNvPr id="7" name="안내 문구"/>
           <p:cNvSpPr txBox="1"/>
           <p:nvPr/>
         </p:nvSpPr>
         <p:spPr>
           <a:xfrm>
-            <a:off x="853418" y="4617720"/>
-            <a:ext cx="6095847" cy="914400"/>
+            <a:off x="6827349" y="4754880"/>
+            <a:ext cx="4632844" cy="914400"/>
           </a:xfrm>
           <a:prstGeom prst="rect">
             <a:avLst/>
@@ -5876,7 +6185,7 @@
             <a:r>
               <a:rPr sz="1400" b="0" i="0">
                 <a:solidFill>
-                  <a:srgbClr val="666666"/>
+                  <a:srgbClr val="26231F"/>
                 </a:solidFill>
               </a:rPr>
               <a:t>고맙습니다 · 가족 이름</a:t>
@@ -5903,34 +6212,34 @@
         <a:sysClr val="window" lastClr="FFFFFF"/>
       </a:lt1>
       <a:dk2>
-        <a:srgbClr val="59472C"/>
+        <a:srgbClr val="493B27"/>
       </a:dk2>
       <a:lt2>
-        <a:srgbClr val="F8F5F1"/>
+        <a:srgbClr val="FBF5EC"/>
       </a:lt2>
       <a:accent1>
-        <a:srgbClr val="9D7D4D"/>
+        <a:srgbClr val="D8B279"/>
       </a:accent1>
       <a:accent2>
-        <a:srgbClr val="438289"/>
+        <a:srgbClr val="DCE198"/>
       </a:accent2>
       <a:accent3>
-        <a:srgbClr val="59472C"/>
+        <a:srgbClr val="493B27"/>
       </a:accent3>
       <a:accent4>
-        <a:srgbClr val="ECE3D4"/>
+        <a:srgbClr val="F6E9D5"/>
       </a:accent4>
       <a:accent5>
-        <a:srgbClr val="70806B"/>
+        <a:srgbClr val="DACA88"/>
       </a:accent5>
       <a:accent6>
-        <a:srgbClr val="9B9180"/>
+        <a:srgbClr val="92897D"/>
       </a:accent6>
       <a:hlink>
-        <a:srgbClr val="9D7D4D"/>
+        <a:srgbClr val="D8B279"/>
       </a:hlink>
       <a:folHlink>
-        <a:srgbClr val="59472C"/>
+        <a:srgbClr val="493B27"/>
       </a:folHlink>
     </a:clrScheme>
     <a:fontScheme name="Office">
